--- a/tests/DotnetPoi.Interop.Tests/fixtures/from-poi/phase-pptx-comprehensive.pptx
+++ b/tests/DotnetPoi.Interop.Tests/fixtures/from-poi/phase-pptx-comprehensive.pptx
@@ -3082,7 +3082,7 @@
               <a:defRPr/>
             </a:pPr>
             <a:r>
-              <a:rPr lang="en"/>
+              <a:rPr lang="ja-JP"/>
               <a:t/>
             </a:r>
             <a:endParaRPr lang="en-US" sz="1100"/>
